--- a/ContinuationProject/ContentTeam/ProcessColumnComponents.pptx
+++ b/ContinuationProject/ContentTeam/ProcessColumnComponents.pptx
@@ -5,21 +5,18 @@
     <p:sldMasterId id="2147483660" r:id="rId1"/>
   </p:sldMasterIdLst>
   <p:notesMasterIdLst>
-    <p:notesMasterId r:id="rId9"/>
+    <p:notesMasterId r:id="rId6"/>
   </p:notesMasterIdLst>
   <p:sldIdLst>
     <p:sldId id="278" r:id="rId2"/>
     <p:sldId id="383" r:id="rId3"/>
-    <p:sldId id="384" r:id="rId4"/>
-    <p:sldId id="385" r:id="rId5"/>
-    <p:sldId id="386" r:id="rId6"/>
-    <p:sldId id="387" r:id="rId7"/>
-    <p:sldId id="381" r:id="rId8"/>
+    <p:sldId id="387" r:id="rId4"/>
+    <p:sldId id="386" r:id="rId5"/>
   </p:sldIdLst>
   <p:sldSz cx="9144000" cy="5143500" type="screen16x9"/>
   <p:notesSz cx="6858000" cy="9144000"/>
   <p:custDataLst>
-    <p:tags r:id="rId10"/>
+    <p:tags r:id="rId7"/>
   </p:custDataLst>
   <p:defaultTextStyle>
     <a:defPPr>
@@ -203,101 +200,6 @@
     </pc:docChg>
   </pc:docChgLst>
   <pc:docChgLst>
-    <pc:chgData name="Tonia Pedersen" userId="90b35334-d922-4736-a054-f475bb830731" providerId="ADAL" clId="{C46C992B-EC4A-4F0D-9285-421CC8879411}"/>
-    <pc:docChg chg="custSel modSld">
-      <pc:chgData name="Tonia Pedersen" userId="90b35334-d922-4736-a054-f475bb830731" providerId="ADAL" clId="{C46C992B-EC4A-4F0D-9285-421CC8879411}" dt="2025-08-18T10:02:26.537" v="7" actId="478"/>
-      <pc:docMkLst>
-        <pc:docMk/>
-      </pc:docMkLst>
-      <pc:sldChg chg="addSp delSp modSp mod">
-        <pc:chgData name="Tonia Pedersen" userId="90b35334-d922-4736-a054-f475bb830731" providerId="ADAL" clId="{C46C992B-EC4A-4F0D-9285-421CC8879411}" dt="2025-08-18T10:02:15.494" v="6"/>
-        <pc:sldMkLst>
-          <pc:docMk/>
-          <pc:sldMk cId="986382170" sldId="385"/>
-        </pc:sldMkLst>
-        <pc:spChg chg="add del mod">
-          <ac:chgData name="Tonia Pedersen" userId="90b35334-d922-4736-a054-f475bb830731" providerId="ADAL" clId="{C46C992B-EC4A-4F0D-9285-421CC8879411}" dt="2025-08-18T10:02:07.467" v="5" actId="478"/>
-          <ac:spMkLst>
-            <pc:docMk/>
-            <pc:sldMk cId="986382170" sldId="385"/>
-            <ac:spMk id="3" creationId="{023148A8-3A86-E76D-551A-384FE0FFD7B9}"/>
-          </ac:spMkLst>
-        </pc:spChg>
-        <pc:spChg chg="del mod">
-          <ac:chgData name="Tonia Pedersen" userId="90b35334-d922-4736-a054-f475bb830731" providerId="ADAL" clId="{C46C992B-EC4A-4F0D-9285-421CC8879411}" dt="2025-08-18T10:02:00.620" v="2" actId="478"/>
-          <ac:spMkLst>
-            <pc:docMk/>
-            <pc:sldMk cId="986382170" sldId="385"/>
-            <ac:spMk id="7" creationId="{61A3B9D7-D905-62DE-BEF1-0519FC4841D1}"/>
-          </ac:spMkLst>
-        </pc:spChg>
-        <pc:spChg chg="del">
-          <ac:chgData name="Tonia Pedersen" userId="90b35334-d922-4736-a054-f475bb830731" providerId="ADAL" clId="{C46C992B-EC4A-4F0D-9285-421CC8879411}" dt="2025-08-18T10:02:07.467" v="5" actId="478"/>
-          <ac:spMkLst>
-            <pc:docMk/>
-            <pc:sldMk cId="986382170" sldId="385"/>
-            <ac:spMk id="8" creationId="{0C6AA2B1-B22B-5297-85C0-1655250DC120}"/>
-          </ac:spMkLst>
-        </pc:spChg>
-        <pc:spChg chg="add mod">
-          <ac:chgData name="Tonia Pedersen" userId="90b35334-d922-4736-a054-f475bb830731" providerId="ADAL" clId="{C46C992B-EC4A-4F0D-9285-421CC8879411}" dt="2025-08-18T10:02:15.494" v="6"/>
-          <ac:spMkLst>
-            <pc:docMk/>
-            <pc:sldMk cId="986382170" sldId="385"/>
-            <ac:spMk id="9" creationId="{B8414C30-3B0A-A952-5949-3DC4625D9C70}"/>
-          </ac:spMkLst>
-        </pc:spChg>
-        <pc:spChg chg="add mod">
-          <ac:chgData name="Tonia Pedersen" userId="90b35334-d922-4736-a054-f475bb830731" providerId="ADAL" clId="{C46C992B-EC4A-4F0D-9285-421CC8879411}" dt="2025-08-18T10:02:15.494" v="6"/>
-          <ac:spMkLst>
-            <pc:docMk/>
-            <pc:sldMk cId="986382170" sldId="385"/>
-            <ac:spMk id="10" creationId="{B716A3F4-62B3-104A-B9EA-9D874CCB7F2F}"/>
-          </ac:spMkLst>
-        </pc:spChg>
-        <pc:picChg chg="del">
-          <ac:chgData name="Tonia Pedersen" userId="90b35334-d922-4736-a054-f475bb830731" providerId="ADAL" clId="{C46C992B-EC4A-4F0D-9285-421CC8879411}" dt="2025-08-18T10:01:57.909" v="0" actId="478"/>
-          <ac:picMkLst>
-            <pc:docMk/>
-            <pc:sldMk cId="986382170" sldId="385"/>
-            <ac:picMk id="5" creationId="{33439D2F-BBB0-19B2-4DC9-13E9FF2ABB67}"/>
-          </ac:picMkLst>
-        </pc:picChg>
-        <pc:picChg chg="add del mod">
-          <ac:chgData name="Tonia Pedersen" userId="90b35334-d922-4736-a054-f475bb830731" providerId="ADAL" clId="{C46C992B-EC4A-4F0D-9285-421CC8879411}" dt="2025-08-18T10:02:07.467" v="5" actId="478"/>
-          <ac:picMkLst>
-            <pc:docMk/>
-            <pc:sldMk cId="986382170" sldId="385"/>
-            <ac:picMk id="6" creationId="{03E7F2DC-B685-E2DD-A47C-CAD817E694C8}"/>
-          </ac:picMkLst>
-        </pc:picChg>
-        <pc:picChg chg="add mod">
-          <ac:chgData name="Tonia Pedersen" userId="90b35334-d922-4736-a054-f475bb830731" providerId="ADAL" clId="{C46C992B-EC4A-4F0D-9285-421CC8879411}" dt="2025-08-18T10:02:15.494" v="6"/>
-          <ac:picMkLst>
-            <pc:docMk/>
-            <pc:sldMk cId="986382170" sldId="385"/>
-            <ac:picMk id="11" creationId="{BDFA1C43-6298-F01B-9C28-6882411B07D9}"/>
-          </ac:picMkLst>
-        </pc:picChg>
-      </pc:sldChg>
-      <pc:sldChg chg="delSp mod">
-        <pc:chgData name="Tonia Pedersen" userId="90b35334-d922-4736-a054-f475bb830731" providerId="ADAL" clId="{C46C992B-EC4A-4F0D-9285-421CC8879411}" dt="2025-08-18T10:02:26.537" v="7" actId="478"/>
-        <pc:sldMkLst>
-          <pc:docMk/>
-          <pc:sldMk cId="1284707976" sldId="387"/>
-        </pc:sldMkLst>
-        <pc:picChg chg="del">
-          <ac:chgData name="Tonia Pedersen" userId="90b35334-d922-4736-a054-f475bb830731" providerId="ADAL" clId="{C46C992B-EC4A-4F0D-9285-421CC8879411}" dt="2025-08-18T10:02:26.537" v="7" actId="478"/>
-          <ac:picMkLst>
-            <pc:docMk/>
-            <pc:sldMk cId="1284707976" sldId="387"/>
-            <ac:picMk id="14" creationId="{5A2EC77F-D0D7-766D-B950-66683919AE4E}"/>
-          </ac:picMkLst>
-        </pc:picChg>
-      </pc:sldChg>
-    </pc:docChg>
-  </pc:docChgLst>
-  <pc:docChgLst>
     <pc:chgData name="Tonia Pedersen" userId="90b35334-d922-4736-a054-f475bb830731" providerId="ADAL" clId="{2B9D6AE0-0F6E-40F1-81E3-5EB61C1DFBF5}"/>
     <pc:docChg chg="undo custSel modSld">
       <pc:chgData name="Tonia Pedersen" userId="90b35334-d922-4736-a054-f475bb830731" providerId="ADAL" clId="{2B9D6AE0-0F6E-40F1-81E3-5EB61C1DFBF5}" dt="2025-08-13T11:31:04.033" v="406" actId="6549"/>
@@ -444,6 +346,101 @@
       </pc:sldChg>
     </pc:docChg>
   </pc:docChgLst>
+  <pc:docChgLst>
+    <pc:chgData name="Tonia Pedersen" userId="90b35334-d922-4736-a054-f475bb830731" providerId="ADAL" clId="{C46C992B-EC4A-4F0D-9285-421CC8879411}"/>
+    <pc:docChg chg="custSel modSld">
+      <pc:chgData name="Tonia Pedersen" userId="90b35334-d922-4736-a054-f475bb830731" providerId="ADAL" clId="{C46C992B-EC4A-4F0D-9285-421CC8879411}" dt="2025-08-18T10:02:26.537" v="7" actId="478"/>
+      <pc:docMkLst>
+        <pc:docMk/>
+      </pc:docMkLst>
+      <pc:sldChg chg="addSp delSp modSp mod">
+        <pc:chgData name="Tonia Pedersen" userId="90b35334-d922-4736-a054-f475bb830731" providerId="ADAL" clId="{C46C992B-EC4A-4F0D-9285-421CC8879411}" dt="2025-08-18T10:02:15.494" v="6"/>
+        <pc:sldMkLst>
+          <pc:docMk/>
+          <pc:sldMk cId="986382170" sldId="385"/>
+        </pc:sldMkLst>
+        <pc:spChg chg="add del mod">
+          <ac:chgData name="Tonia Pedersen" userId="90b35334-d922-4736-a054-f475bb830731" providerId="ADAL" clId="{C46C992B-EC4A-4F0D-9285-421CC8879411}" dt="2025-08-18T10:02:07.467" v="5" actId="478"/>
+          <ac:spMkLst>
+            <pc:docMk/>
+            <pc:sldMk cId="986382170" sldId="385"/>
+            <ac:spMk id="3" creationId="{023148A8-3A86-E76D-551A-384FE0FFD7B9}"/>
+          </ac:spMkLst>
+        </pc:spChg>
+        <pc:spChg chg="del mod">
+          <ac:chgData name="Tonia Pedersen" userId="90b35334-d922-4736-a054-f475bb830731" providerId="ADAL" clId="{C46C992B-EC4A-4F0D-9285-421CC8879411}" dt="2025-08-18T10:02:00.620" v="2" actId="478"/>
+          <ac:spMkLst>
+            <pc:docMk/>
+            <pc:sldMk cId="986382170" sldId="385"/>
+            <ac:spMk id="7" creationId="{61A3B9D7-D905-62DE-BEF1-0519FC4841D1}"/>
+          </ac:spMkLst>
+        </pc:spChg>
+        <pc:spChg chg="del">
+          <ac:chgData name="Tonia Pedersen" userId="90b35334-d922-4736-a054-f475bb830731" providerId="ADAL" clId="{C46C992B-EC4A-4F0D-9285-421CC8879411}" dt="2025-08-18T10:02:07.467" v="5" actId="478"/>
+          <ac:spMkLst>
+            <pc:docMk/>
+            <pc:sldMk cId="986382170" sldId="385"/>
+            <ac:spMk id="8" creationId="{0C6AA2B1-B22B-5297-85C0-1655250DC120}"/>
+          </ac:spMkLst>
+        </pc:spChg>
+        <pc:spChg chg="add mod">
+          <ac:chgData name="Tonia Pedersen" userId="90b35334-d922-4736-a054-f475bb830731" providerId="ADAL" clId="{C46C992B-EC4A-4F0D-9285-421CC8879411}" dt="2025-08-18T10:02:15.494" v="6"/>
+          <ac:spMkLst>
+            <pc:docMk/>
+            <pc:sldMk cId="986382170" sldId="385"/>
+            <ac:spMk id="9" creationId="{B8414C30-3B0A-A952-5949-3DC4625D9C70}"/>
+          </ac:spMkLst>
+        </pc:spChg>
+        <pc:spChg chg="add mod">
+          <ac:chgData name="Tonia Pedersen" userId="90b35334-d922-4736-a054-f475bb830731" providerId="ADAL" clId="{C46C992B-EC4A-4F0D-9285-421CC8879411}" dt="2025-08-18T10:02:15.494" v="6"/>
+          <ac:spMkLst>
+            <pc:docMk/>
+            <pc:sldMk cId="986382170" sldId="385"/>
+            <ac:spMk id="10" creationId="{B716A3F4-62B3-104A-B9EA-9D874CCB7F2F}"/>
+          </ac:spMkLst>
+        </pc:spChg>
+        <pc:picChg chg="del">
+          <ac:chgData name="Tonia Pedersen" userId="90b35334-d922-4736-a054-f475bb830731" providerId="ADAL" clId="{C46C992B-EC4A-4F0D-9285-421CC8879411}" dt="2025-08-18T10:01:57.909" v="0" actId="478"/>
+          <ac:picMkLst>
+            <pc:docMk/>
+            <pc:sldMk cId="986382170" sldId="385"/>
+            <ac:picMk id="5" creationId="{33439D2F-BBB0-19B2-4DC9-13E9FF2ABB67}"/>
+          </ac:picMkLst>
+        </pc:picChg>
+        <pc:picChg chg="add del mod">
+          <ac:chgData name="Tonia Pedersen" userId="90b35334-d922-4736-a054-f475bb830731" providerId="ADAL" clId="{C46C992B-EC4A-4F0D-9285-421CC8879411}" dt="2025-08-18T10:02:07.467" v="5" actId="478"/>
+          <ac:picMkLst>
+            <pc:docMk/>
+            <pc:sldMk cId="986382170" sldId="385"/>
+            <ac:picMk id="6" creationId="{03E7F2DC-B685-E2DD-A47C-CAD817E694C8}"/>
+          </ac:picMkLst>
+        </pc:picChg>
+        <pc:picChg chg="add mod">
+          <ac:chgData name="Tonia Pedersen" userId="90b35334-d922-4736-a054-f475bb830731" providerId="ADAL" clId="{C46C992B-EC4A-4F0D-9285-421CC8879411}" dt="2025-08-18T10:02:15.494" v="6"/>
+          <ac:picMkLst>
+            <pc:docMk/>
+            <pc:sldMk cId="986382170" sldId="385"/>
+            <ac:picMk id="11" creationId="{BDFA1C43-6298-F01B-9C28-6882411B07D9}"/>
+          </ac:picMkLst>
+        </pc:picChg>
+      </pc:sldChg>
+      <pc:sldChg chg="delSp mod">
+        <pc:chgData name="Tonia Pedersen" userId="90b35334-d922-4736-a054-f475bb830731" providerId="ADAL" clId="{C46C992B-EC4A-4F0D-9285-421CC8879411}" dt="2025-08-18T10:02:26.537" v="7" actId="478"/>
+        <pc:sldMkLst>
+          <pc:docMk/>
+          <pc:sldMk cId="1284707976" sldId="387"/>
+        </pc:sldMkLst>
+        <pc:picChg chg="del">
+          <ac:chgData name="Tonia Pedersen" userId="90b35334-d922-4736-a054-f475bb830731" providerId="ADAL" clId="{C46C992B-EC4A-4F0D-9285-421CC8879411}" dt="2025-08-18T10:02:26.537" v="7" actId="478"/>
+          <ac:picMkLst>
+            <pc:docMk/>
+            <pc:sldMk cId="1284707976" sldId="387"/>
+            <ac:picMk id="14" creationId="{5A2EC77F-D0D7-766D-B950-66683919AE4E}"/>
+          </ac:picMkLst>
+        </pc:picChg>
+      </pc:sldChg>
+    </pc:docChg>
+  </pc:docChgLst>
 </pc:chgInfo>
 </file>
 
@@ -535,7 +532,7 @@
             <a:fld id="{4AA9FAFC-2319-504C-A7E6-C27BB7BBEBBC}" type="datetimeFigureOut">
               <a:rPr lang="mr-IN"/>
               <a:pPr/>
-              <a:t>18-08-2025</a:t>
+              <a:t>29-09-2025</a:t>
             </a:fld>
             <a:endParaRPr lang="mr-IN"/>
           </a:p>
@@ -805,264 +802,6 @@
     </a:lvl9pPr>
   </p:notesStyle>
 </p:notesMaster>
-</file>
-
-<file path=ppt/notesSlides/notesSlide1.xml><?xml version="1.0" encoding="utf-8"?>
-<p:notes xmlns:a="http://schemas.openxmlformats.org/drawingml/2006/main" xmlns:r="http://schemas.openxmlformats.org/officeDocument/2006/relationships" xmlns:p="http://schemas.openxmlformats.org/presentationml/2006/main">
-  <p:cSld>
-    <p:spTree>
-      <p:nvGrpSpPr>
-        <p:cNvPr id="1" name=""/>
-        <p:cNvGrpSpPr/>
-        <p:nvPr/>
-      </p:nvGrpSpPr>
-      <p:grpSpPr>
-        <a:xfrm>
-          <a:off x="0" y="0"/>
-          <a:ext cx="0" cy="0"/>
-          <a:chOff x="0" y="0"/>
-          <a:chExt cx="0" cy="0"/>
-        </a:xfrm>
-      </p:grpSpPr>
-      <p:sp>
-        <p:nvSpPr>
-          <p:cNvPr id="2" name="Folienbildplatzhalter 1"/>
-          <p:cNvSpPr>
-            <a:spLocks noGrp="1" noRot="1" noChangeAspect="1"/>
-          </p:cNvSpPr>
-          <p:nvPr>
-            <p:ph type="sldImg"/>
-          </p:nvPr>
-        </p:nvSpPr>
-        <p:spPr/>
-      </p:sp>
-      <p:sp>
-        <p:nvSpPr>
-          <p:cNvPr id="3" name="Notizenplatzhalter 2"/>
-          <p:cNvSpPr>
-            <a:spLocks noGrp="1"/>
-          </p:cNvSpPr>
-          <p:nvPr>
-            <p:ph type="body" idx="1"/>
-          </p:nvPr>
-        </p:nvSpPr>
-        <p:spPr/>
-        <p:txBody>
-          <a:bodyPr/>
-          <a:lstStyle/>
-          <a:p>
-            <a:r>
-              <a:rPr lang="en-US" dirty="0"/>
-              <a:t>&lt;ProcessSignalGeneratingSystem ID = "ProcessSignalGeneratingSystem-1" </a:t>
-            </a:r>
-            <a:r>
-              <a:rPr lang="en-US" dirty="0" err="1"/>
-              <a:t>ComponentClass</a:t>
-            </a:r>
-            <a:r>
-              <a:rPr lang="en-US" dirty="0"/>
-              <a:t> = "ProcessSignalGeneratingSystem"&gt;</a:t>
-            </a:r>
-          </a:p>
-          <a:p>
-            <a:r>
-              <a:rPr lang="en-US" dirty="0"/>
-              <a:t>  &lt;ProcessSignalGeneratingSystemComponent ID = "SensorWellReference-1" </a:t>
-            </a:r>
-            <a:r>
-              <a:rPr lang="en-US" dirty="0" err="1"/>
-              <a:t>ComponentClass</a:t>
-            </a:r>
-            <a:r>
-              <a:rPr lang="en-US" dirty="0"/>
-              <a:t> = "SensorWellReference"&gt;</a:t>
-            </a:r>
-          </a:p>
-          <a:p>
-            <a:r>
-              <a:rPr lang="en-US" dirty="0"/>
-              <a:t>    &lt;Association Type = "refers to" </a:t>
-            </a:r>
-            <a:r>
-              <a:rPr lang="en-US" dirty="0" err="1"/>
-              <a:t>ItemID</a:t>
-            </a:r>
-            <a:r>
-              <a:rPr lang="en-US" dirty="0"/>
-              <a:t> = "SensorWell-1"/&gt;</a:t>
-            </a:r>
-          </a:p>
-          <a:p>
-            <a:r>
-              <a:rPr lang="en-US" dirty="0"/>
-              <a:t>  &lt;/ProcessSignalGeneratingSystemComponent&gt;</a:t>
-            </a:r>
-          </a:p>
-          <a:p>
-            <a:r>
-              <a:rPr lang="en-US" dirty="0"/>
-              <a:t>&lt;/ProcessSignalGeneratingSystem&gt;</a:t>
-            </a:r>
-          </a:p>
-          <a:p>
-            <a:r>
-              <a:rPr lang="en-US" dirty="0"/>
-              <a:t>&lt;</a:t>
-            </a:r>
-            <a:r>
-              <a:rPr lang="en-US" dirty="0" err="1"/>
-              <a:t>PipingNetworkSystem</a:t>
-            </a:r>
-            <a:r>
-              <a:rPr lang="en-US" dirty="0"/>
-              <a:t> ID = "PipingNetworkSystem-1" </a:t>
-            </a:r>
-            <a:r>
-              <a:rPr lang="en-US" dirty="0" err="1"/>
-              <a:t>ComponentClass</a:t>
-            </a:r>
-            <a:r>
-              <a:rPr lang="en-US" dirty="0"/>
-              <a:t> = "</a:t>
-            </a:r>
-            <a:r>
-              <a:rPr lang="en-US" dirty="0" err="1"/>
-              <a:t>PipingNetworkSystem</a:t>
-            </a:r>
-            <a:r>
-              <a:rPr lang="en-US" dirty="0"/>
-              <a:t>"&gt;</a:t>
-            </a:r>
-          </a:p>
-          <a:p>
-            <a:r>
-              <a:rPr lang="en-US" dirty="0"/>
-              <a:t>  &lt;</a:t>
-            </a:r>
-            <a:r>
-              <a:rPr lang="en-US" dirty="0" err="1"/>
-              <a:t>PipingNetworkSegment</a:t>
-            </a:r>
-            <a:r>
-              <a:rPr lang="en-US" dirty="0"/>
-              <a:t> ID = "PipingNetworkSegment-1" </a:t>
-            </a:r>
-            <a:r>
-              <a:rPr lang="en-US" dirty="0" err="1"/>
-              <a:t>ComponentClass</a:t>
-            </a:r>
-            <a:r>
-              <a:rPr lang="en-US" dirty="0"/>
-              <a:t> = "</a:t>
-            </a:r>
-            <a:r>
-              <a:rPr lang="en-US" dirty="0" err="1"/>
-              <a:t>PipingNetworkSegment</a:t>
-            </a:r>
-            <a:r>
-              <a:rPr lang="en-US" dirty="0"/>
-              <a:t>"&gt;</a:t>
-            </a:r>
-          </a:p>
-          <a:p>
-            <a:r>
-              <a:rPr lang="en-US" dirty="0"/>
-              <a:t>    &lt;PipingComponent ID = "SensorWell-1" </a:t>
-            </a:r>
-            <a:r>
-              <a:rPr lang="en-US" dirty="0" err="1"/>
-              <a:t>ComponentClass</a:t>
-            </a:r>
-            <a:r>
-              <a:rPr lang="en-US" dirty="0"/>
-              <a:t> = "SensorWell"&gt;</a:t>
-            </a:r>
-          </a:p>
-          <a:p>
-            <a:r>
-              <a:rPr lang="en-US" dirty="0"/>
-              <a:t>      &lt;Association Type = "is referenced by" </a:t>
-            </a:r>
-            <a:r>
-              <a:rPr lang="en-US" dirty="0" err="1"/>
-              <a:t>ItemID</a:t>
-            </a:r>
-            <a:r>
-              <a:rPr lang="en-US" dirty="0"/>
-              <a:t> = "SensorWellReference-1"/&gt;</a:t>
-            </a:r>
-          </a:p>
-          <a:p>
-            <a:r>
-              <a:rPr lang="en-US" dirty="0"/>
-              <a:t>    &lt;/PipingComponent&gt;</a:t>
-            </a:r>
-          </a:p>
-          <a:p>
-            <a:r>
-              <a:rPr lang="en-US" dirty="0"/>
-              <a:t>  &lt;/</a:t>
-            </a:r>
-            <a:r>
-              <a:rPr lang="en-US" dirty="0" err="1"/>
-              <a:t>PipingNetworkSegment</a:t>
-            </a:r>
-            <a:r>
-              <a:rPr lang="en-US" dirty="0"/>
-              <a:t>&gt;</a:t>
-            </a:r>
-          </a:p>
-          <a:p>
-            <a:r>
-              <a:rPr lang="en-US" dirty="0"/>
-              <a:t>&lt;/</a:t>
-            </a:r>
-            <a:r>
-              <a:rPr lang="en-US" dirty="0" err="1"/>
-              <a:t>PipingNetworkSystem</a:t>
-            </a:r>
-            <a:r>
-              <a:rPr lang="en-US" dirty="0"/>
-              <a:t>&gt;</a:t>
-            </a:r>
-          </a:p>
-        </p:txBody>
-      </p:sp>
-      <p:sp>
-        <p:nvSpPr>
-          <p:cNvPr id="4" name="Foliennummernplatzhalter 3"/>
-          <p:cNvSpPr>
-            <a:spLocks noGrp="1"/>
-          </p:cNvSpPr>
-          <p:nvPr>
-            <p:ph type="sldNum" sz="quarter" idx="5"/>
-          </p:nvPr>
-        </p:nvSpPr>
-        <p:spPr/>
-        <p:txBody>
-          <a:bodyPr/>
-          <a:lstStyle/>
-          <a:p>
-            <a:fld id="{8E2C8280-5F62-3D48-BBB9-576BF0EE92F4}" type="slidenum">
-              <a:rPr lang="uk-UA" smtClean="0"/>
-              <a:pPr/>
-              <a:t>6</a:t>
-            </a:fld>
-            <a:endParaRPr lang="uk-UA"/>
-          </a:p>
-        </p:txBody>
-      </p:sp>
-    </p:spTree>
-    <p:extLst>
-      <p:ext uri="{BB962C8B-B14F-4D97-AF65-F5344CB8AC3E}">
-        <p14:creationId xmlns:p14="http://schemas.microsoft.com/office/powerpoint/2010/main" val="2110067729"/>
-      </p:ext>
-    </p:extLst>
-  </p:cSld>
-  <p:clrMapOvr>
-    <a:masterClrMapping/>
-  </p:clrMapOvr>
-</p:notes>
 </file>
 
 <file path=ppt/slideLayouts/slideLayout1.xml><?xml version="1.0" encoding="utf-8"?>
@@ -1833,7 +1572,7 @@
             <a:fld id="{C8927868-526A-4C6B-96A5-2F672AB9D3F4}" type="datetimeFigureOut">
               <a:rPr lang="en-US" smtClean="0"/>
               <a:pPr/>
-              <a:t>8/18/2025</a:t>
+              <a:t>9/29/2025</a:t>
             </a:fld>
             <a:endParaRPr lang="en-US"/>
           </a:p>
@@ -4514,7 +4253,7 @@
           <a:p>
             <a:r>
               <a:rPr lang="en-US" dirty="0"/>
-              <a:t>2025-08-13 V1 Tonia Pedersen, Manfred Theißen</a:t>
+              <a:t>2025-09-29 V1 Tonia Pedersen</a:t>
             </a:r>
           </a:p>
         </p:txBody>
@@ -5173,10 +4912,10 @@
       </p:pic>
       <p:pic>
         <p:nvPicPr>
-          <p:cNvPr id="12" name="Picture 11">
+          <p:cNvPr id="6" name="Picture 5">
             <a:extLst>
               <a:ext uri="{FF2B5EF4-FFF2-40B4-BE49-F238E27FC236}">
-                <a16:creationId xmlns:a16="http://schemas.microsoft.com/office/drawing/2014/main" id="{39F03A69-BED3-273D-E27E-B003BE9C099A}"/>
+                <a16:creationId xmlns:a16="http://schemas.microsoft.com/office/drawing/2014/main" id="{7F63A360-744B-962B-871D-D806A0A72ED0}"/>
               </a:ext>
             </a:extLst>
           </p:cNvPr>
@@ -5193,8 +4932,8 @@
         </p:blipFill>
         <p:spPr>
           <a:xfrm>
-            <a:off x="274320" y="1947220"/>
-            <a:ext cx="5378631" cy="1808855"/>
+            <a:off x="169558" y="1990822"/>
+            <a:ext cx="5444011" cy="1714840"/>
           </a:xfrm>
           <a:prstGeom prst="rect">
             <a:avLst/>
@@ -5231,7 +4970,13 @@
   <p:cSld>
     <p:spTree>
       <p:nvGrpSpPr>
-        <p:cNvPr id="1" name=""/>
+        <p:cNvPr id="1" name="">
+          <a:extLst>
+            <a:ext uri="{FF2B5EF4-FFF2-40B4-BE49-F238E27FC236}">
+              <a16:creationId xmlns:a16="http://schemas.microsoft.com/office/drawing/2014/main" id="{B716213C-E870-86D4-5767-CE35FEEB49AE}"/>
+            </a:ext>
+          </a:extLst>
+        </p:cNvPr>
         <p:cNvGrpSpPr/>
         <p:nvPr/>
       </p:nvGrpSpPr>
@@ -5243,12 +4988,42 @@
           <a:chExt cx="0" cy="0"/>
         </a:xfrm>
       </p:grpSpPr>
+      <p:pic>
+        <p:nvPicPr>
+          <p:cNvPr id="7" name="Picture 6">
+            <a:extLst>
+              <a:ext uri="{FF2B5EF4-FFF2-40B4-BE49-F238E27FC236}">
+                <a16:creationId xmlns:a16="http://schemas.microsoft.com/office/drawing/2014/main" id="{CC2C61FA-4C12-316F-B051-54A80B9F08E8}"/>
+              </a:ext>
+            </a:extLst>
+          </p:cNvPr>
+          <p:cNvPicPr>
+            <a:picLocks noChangeAspect="1"/>
+          </p:cNvPicPr>
+          <p:nvPr/>
+        </p:nvPicPr>
+        <p:blipFill>
+          <a:blip r:embed="rId2"/>
+          <a:stretch>
+            <a:fillRect/>
+          </a:stretch>
+        </p:blipFill>
+        <p:spPr>
+          <a:xfrm>
+            <a:off x="5313318" y="1052799"/>
+            <a:ext cx="3387121" cy="3893982"/>
+          </a:xfrm>
+          <a:prstGeom prst="rect">
+            <a:avLst/>
+          </a:prstGeom>
+        </p:spPr>
+      </p:pic>
       <p:sp>
         <p:nvSpPr>
           <p:cNvPr id="2" name="Titel 1">
             <a:extLst>
               <a:ext uri="{FF2B5EF4-FFF2-40B4-BE49-F238E27FC236}">
-                <a16:creationId xmlns:a16="http://schemas.microsoft.com/office/drawing/2014/main" id="{89C0513C-6788-B285-18CF-2889B3C609AC}"/>
+                <a16:creationId xmlns:a16="http://schemas.microsoft.com/office/drawing/2014/main" id="{826F29D6-7BAF-6910-5F50-69D7B7B67EE3}"/>
               </a:ext>
             </a:extLst>
           </p:cNvPr>
@@ -5276,7 +5051,7 @@
           <p:cNvPr id="5" name="Inhaltsplatzhalter 2">
             <a:extLst>
               <a:ext uri="{FF2B5EF4-FFF2-40B4-BE49-F238E27FC236}">
-                <a16:creationId xmlns:a16="http://schemas.microsoft.com/office/drawing/2014/main" id="{2785C376-4320-A6DF-7942-92D6933FA5A6}"/>
+                <a16:creationId xmlns:a16="http://schemas.microsoft.com/office/drawing/2014/main" id="{C70CA906-832E-2F2A-0FDF-F65D4045E8AB}"/>
               </a:ext>
             </a:extLst>
           </p:cNvPr>
@@ -5318,140 +5093,12 @@
           </a:p>
         </p:txBody>
       </p:sp>
-      <p:pic>
-        <p:nvPicPr>
-          <p:cNvPr id="9" name="Picture 8">
+      <p:sp>
+        <p:nvSpPr>
+          <p:cNvPr id="3" name="Rechteck 7">
             <a:extLst>
               <a:ext uri="{FF2B5EF4-FFF2-40B4-BE49-F238E27FC236}">
-                <a16:creationId xmlns:a16="http://schemas.microsoft.com/office/drawing/2014/main" id="{777FEE6F-2C8D-260D-5F3F-A547981027CC}"/>
-              </a:ext>
-            </a:extLst>
-          </p:cNvPr>
-          <p:cNvPicPr>
-            <a:picLocks noChangeAspect="1"/>
-          </p:cNvPicPr>
-          <p:nvPr/>
-        </p:nvPicPr>
-        <p:blipFill>
-          <a:blip r:embed="rId2"/>
-          <a:stretch>
-            <a:fillRect/>
-          </a:stretch>
-        </p:blipFill>
-        <p:spPr>
-          <a:xfrm>
-            <a:off x="427807" y="1537047"/>
-            <a:ext cx="6296297" cy="3498549"/>
-          </a:xfrm>
-          <a:prstGeom prst="rect">
-            <a:avLst/>
-          </a:prstGeom>
-        </p:spPr>
-      </p:pic>
-    </p:spTree>
-    <p:extLst>
-      <p:ext uri="{BB962C8B-B14F-4D97-AF65-F5344CB8AC3E}">
-        <p14:creationId xmlns:p14="http://schemas.microsoft.com/office/powerpoint/2010/main" val="536095974"/>
-      </p:ext>
-    </p:extLst>
-  </p:cSld>
-  <p:clrMapOvr>
-    <a:masterClrMapping/>
-  </p:clrMapOvr>
-  <mc:AlternateContent xmlns:mc="http://schemas.openxmlformats.org/markup-compatibility/2006" xmlns:p14="http://schemas.microsoft.com/office/powerpoint/2010/main">
-    <mc:Choice Requires="p14">
-      <p:transition p14:dur="250">
-        <p:fade/>
-      </p:transition>
-    </mc:Choice>
-    <mc:Fallback xmlns="">
-      <p:transition>
-        <p:fade/>
-      </p:transition>
-    </mc:Fallback>
-  </mc:AlternateContent>
-</p:sld>
-</file>
-
-<file path=ppt/slides/slide4.xml><?xml version="1.0" encoding="utf-8"?>
-<p:sld xmlns:a="http://schemas.openxmlformats.org/drawingml/2006/main" xmlns:r="http://schemas.openxmlformats.org/officeDocument/2006/relationships" xmlns:p="http://schemas.openxmlformats.org/presentationml/2006/main" show="0">
-  <p:cSld>
-    <p:spTree>
-      <p:nvGrpSpPr>
-        <p:cNvPr id="1" name=""/>
-        <p:cNvGrpSpPr/>
-        <p:nvPr/>
-      </p:nvGrpSpPr>
-      <p:grpSpPr>
-        <a:xfrm>
-          <a:off x="0" y="0"/>
-          <a:ext cx="0" cy="0"/>
-          <a:chOff x="0" y="0"/>
-          <a:chExt cx="0" cy="0"/>
-        </a:xfrm>
-      </p:grpSpPr>
-      <p:sp>
-        <p:nvSpPr>
-          <p:cNvPr id="2" name="Titel 1">
-            <a:extLst>
-              <a:ext uri="{FF2B5EF4-FFF2-40B4-BE49-F238E27FC236}">
-                <a16:creationId xmlns:a16="http://schemas.microsoft.com/office/drawing/2014/main" id="{89C0513C-6788-B285-18CF-2889B3C609AC}"/>
-              </a:ext>
-            </a:extLst>
-          </p:cNvPr>
-          <p:cNvSpPr>
-            <a:spLocks noGrp="1"/>
-          </p:cNvSpPr>
-          <p:nvPr>
-            <p:ph type="title"/>
-          </p:nvPr>
-        </p:nvSpPr>
-        <p:spPr/>
-        <p:txBody>
-          <a:bodyPr/>
-          <a:lstStyle/>
-          <a:p>
-            <a:r>
-              <a:rPr lang="en-US" dirty="0"/>
-              <a:t>Example</a:t>
-            </a:r>
-          </a:p>
-        </p:txBody>
-      </p:sp>
-      <p:sp>
-        <p:nvSpPr>
-          <p:cNvPr id="4" name="Textplatzhalter 3">
-            <a:extLst>
-              <a:ext uri="{FF2B5EF4-FFF2-40B4-BE49-F238E27FC236}">
-                <a16:creationId xmlns:a16="http://schemas.microsoft.com/office/drawing/2014/main" id="{EC3FFD93-3290-B18C-9CCD-912F82BF1448}"/>
-              </a:ext>
-            </a:extLst>
-          </p:cNvPr>
-          <p:cNvSpPr>
-            <a:spLocks noGrp="1"/>
-          </p:cNvSpPr>
-          <p:nvPr>
-            <p:ph type="body" sz="quarter" idx="10"/>
-          </p:nvPr>
-        </p:nvSpPr>
-        <p:spPr/>
-        <p:txBody>
-          <a:bodyPr/>
-          <a:lstStyle/>
-          <a:p>
-            <a:r>
-              <a:rPr lang="en-US" dirty="0"/>
-              <a:t>RDL References</a:t>
-            </a:r>
-          </a:p>
-        </p:txBody>
-      </p:sp>
-      <p:sp>
-        <p:nvSpPr>
-          <p:cNvPr id="9" name="Rechteck 7">
-            <a:extLst>
-              <a:ext uri="{FF2B5EF4-FFF2-40B4-BE49-F238E27FC236}">
-                <a16:creationId xmlns:a16="http://schemas.microsoft.com/office/drawing/2014/main" id="{B8414C30-3B0A-A952-5949-3DC4625D9C70}"/>
+                <a16:creationId xmlns:a16="http://schemas.microsoft.com/office/drawing/2014/main" id="{DB7E959A-3835-3D23-4F22-0E13EE7A083A}"/>
               </a:ext>
             </a:extLst>
           </p:cNvPr>
@@ -5460,7 +5107,7 @@
         </p:nvSpPr>
         <p:spPr>
           <a:xfrm>
-            <a:off x="5833854" y="1649547"/>
+            <a:off x="304800" y="1667714"/>
             <a:ext cx="3200896" cy="3279735"/>
           </a:xfrm>
           <a:prstGeom prst="rect">
@@ -5509,10 +5156,10 @@
       </p:sp>
       <p:sp>
         <p:nvSpPr>
-          <p:cNvPr id="10" name="Inhaltsplatzhalter 2">
+          <p:cNvPr id="4" name="Inhaltsplatzhalter 2">
             <a:extLst>
               <a:ext uri="{FF2B5EF4-FFF2-40B4-BE49-F238E27FC236}">
-                <a16:creationId xmlns:a16="http://schemas.microsoft.com/office/drawing/2014/main" id="{B716A3F4-62B3-104A-B9EA-9D874CCB7F2F}"/>
+                <a16:creationId xmlns:a16="http://schemas.microsoft.com/office/drawing/2014/main" id="{124701CB-AEBB-A705-EBEB-12919DA093A2}"/>
               </a:ext>
             </a:extLst>
           </p:cNvPr>
@@ -5523,7 +5170,7 @@
         </p:nvSpPr>
         <p:spPr>
           <a:xfrm>
-            <a:off x="5972614" y="1785742"/>
+            <a:off x="443560" y="1803909"/>
             <a:ext cx="2941272" cy="786008"/>
           </a:xfrm>
           <a:prstGeom prst="rect">
@@ -5728,7 +5375,7 @@
             </a:r>
             <a:r>
               <a:rPr lang="en-US" sz="1400" dirty="0"/>
-              <a:t>vortex breaker, vane pack, tower tray, tower packing, demister pad</a:t>
+              <a:t>vortex breaker, vane pack, tower tray, tower packing, demister pad **Equinor symbol legend</a:t>
             </a:r>
             <a:endParaRPr lang="en-US" dirty="0"/>
           </a:p>
@@ -5736,10 +5383,10 @@
       </p:sp>
       <p:pic>
         <p:nvPicPr>
-          <p:cNvPr id="11" name="Picture 10">
+          <p:cNvPr id="6" name="Picture 5">
             <a:extLst>
               <a:ext uri="{FF2B5EF4-FFF2-40B4-BE49-F238E27FC236}">
-                <a16:creationId xmlns:a16="http://schemas.microsoft.com/office/drawing/2014/main" id="{BDFA1C43-6298-F01B-9C28-6882411B07D9}"/>
+                <a16:creationId xmlns:a16="http://schemas.microsoft.com/office/drawing/2014/main" id="{8C61B48C-C29F-617C-03C9-2BBD5B06478D}"/>
               </a:ext>
             </a:extLst>
           </p:cNvPr>
@@ -5749,14 +5396,14 @@
           <p:nvPr/>
         </p:nvPicPr>
         <p:blipFill>
-          <a:blip r:embed="rId2"/>
+          <a:blip r:embed="rId3"/>
           <a:stretch>
             <a:fillRect/>
           </a:stretch>
         </p:blipFill>
         <p:spPr>
           <a:xfrm>
-            <a:off x="5972614" y="2500098"/>
+            <a:off x="443560" y="2518265"/>
             <a:ext cx="2251350" cy="2301551"/>
           </a:xfrm>
           <a:prstGeom prst="rect">
@@ -5764,23 +5411,82 @@
           </a:prstGeom>
         </p:spPr>
       </p:pic>
+      <p:sp>
+        <p:nvSpPr>
+          <p:cNvPr id="8" name="TextBox 7">
+            <a:extLst>
+              <a:ext uri="{FF2B5EF4-FFF2-40B4-BE49-F238E27FC236}">
+                <a16:creationId xmlns:a16="http://schemas.microsoft.com/office/drawing/2014/main" id="{3FE1326E-9A81-412E-2535-84A7E71BB7EE}"/>
+              </a:ext>
+            </a:extLst>
+          </p:cNvPr>
+          <p:cNvSpPr txBox="1"/>
+          <p:nvPr/>
+        </p:nvSpPr>
+        <p:spPr>
+          <a:xfrm>
+            <a:off x="4772610" y="2139571"/>
+            <a:ext cx="1425776" cy="664797"/>
+          </a:xfrm>
+          <a:prstGeom prst="rect">
+            <a:avLst/>
+          </a:prstGeom>
+          <a:noFill/>
+        </p:spPr>
+        <p:txBody>
+          <a:bodyPr wrap="square" lIns="0" tIns="0" rIns="0" bIns="0" rtlCol="0">
+            <a:spAutoFit/>
+          </a:bodyPr>
+          <a:lstStyle/>
+          <a:p>
+            <a:pPr>
+              <a:lnSpc>
+                <a:spcPct val="90000"/>
+              </a:lnSpc>
+            </a:pPr>
+            <a:r>
+              <a:rPr lang="en-GB" sz="800" dirty="0"/>
+              <a:t>** Yellow: indicates sub-types suggested for inclusion in DEXPI</a:t>
+            </a:r>
+          </a:p>
+          <a:p>
+            <a:pPr>
+              <a:lnSpc>
+                <a:spcPct val="90000"/>
+              </a:lnSpc>
+            </a:pPr>
+            <a:endParaRPr lang="en-GB" sz="800" dirty="0"/>
+          </a:p>
+          <a:p>
+            <a:pPr>
+              <a:lnSpc>
+                <a:spcPct val="90000"/>
+              </a:lnSpc>
+            </a:pPr>
+            <a:r>
+              <a:rPr lang="en-GB" sz="800" dirty="0"/>
+              <a:t>**Purple: indicates addition custom sub-types identified by Equinor</a:t>
+            </a:r>
+          </a:p>
+        </p:txBody>
+      </p:sp>
     </p:spTree>
     <p:extLst>
       <p:ext uri="{BB962C8B-B14F-4D97-AF65-F5344CB8AC3E}">
-        <p14:creationId xmlns:p14="http://schemas.microsoft.com/office/powerpoint/2010/main" val="986382170"/>
+        <p14:creationId xmlns:p14="http://schemas.microsoft.com/office/powerpoint/2010/main" val="250236224"/>
       </p:ext>
     </p:extLst>
   </p:cSld>
   <p:clrMapOvr>
     <a:masterClrMapping/>
   </p:clrMapOvr>
-  <mc:AlternateContent xmlns:mc="http://schemas.openxmlformats.org/markup-compatibility/2006" xmlns:p14="http://schemas.microsoft.com/office/powerpoint/2010/main">
-    <mc:Choice Requires="p14">
+  <mc:AlternateContent xmlns:mc="http://schemas.openxmlformats.org/markup-compatibility/2006">
+    <mc:Choice xmlns:p14="http://schemas.microsoft.com/office/powerpoint/2010/main" Requires="p14">
       <p:transition p14:dur="250">
         <p:fade/>
       </p:transition>
     </mc:Choice>
-    <mc:Fallback xmlns="">
+    <mc:Fallback>
       <p:transition>
         <p:fade/>
       </p:transition>
@@ -5789,228 +5495,7 @@
 </p:sld>
 </file>
 
-<file path=ppt/slides/slide5.xml><?xml version="1.0" encoding="utf-8"?>
-<p:sld xmlns:a="http://schemas.openxmlformats.org/drawingml/2006/main" xmlns:r="http://schemas.openxmlformats.org/officeDocument/2006/relationships" xmlns:p="http://schemas.openxmlformats.org/presentationml/2006/main" show="0">
-  <p:cSld>
-    <p:spTree>
-      <p:nvGrpSpPr>
-        <p:cNvPr id="1" name=""/>
-        <p:cNvGrpSpPr/>
-        <p:nvPr/>
-      </p:nvGrpSpPr>
-      <p:grpSpPr>
-        <a:xfrm>
-          <a:off x="0" y="0"/>
-          <a:ext cx="0" cy="0"/>
-          <a:chOff x="0" y="0"/>
-          <a:chExt cx="0" cy="0"/>
-        </a:xfrm>
-      </p:grpSpPr>
-      <p:sp>
-        <p:nvSpPr>
-          <p:cNvPr id="2" name="Titel 1">
-            <a:extLst>
-              <a:ext uri="{FF2B5EF4-FFF2-40B4-BE49-F238E27FC236}">
-                <a16:creationId xmlns:a16="http://schemas.microsoft.com/office/drawing/2014/main" id="{B8DF4CD1-D7BA-2F86-AED5-2D817251F7CD}"/>
-              </a:ext>
-            </a:extLst>
-          </p:cNvPr>
-          <p:cNvSpPr>
-            <a:spLocks noGrp="1"/>
-          </p:cNvSpPr>
-          <p:nvPr>
-            <p:ph type="title"/>
-          </p:nvPr>
-        </p:nvSpPr>
-        <p:spPr/>
-        <p:txBody>
-          <a:bodyPr/>
-          <a:lstStyle/>
-          <a:p>
-            <a:r>
-              <a:rPr lang="en-US" dirty="0"/>
-              <a:t>Proposal (DEXPI 2.0 Implementation)</a:t>
-            </a:r>
-          </a:p>
-        </p:txBody>
-      </p:sp>
-      <p:sp>
-        <p:nvSpPr>
-          <p:cNvPr id="3" name="Inhaltsplatzhalter 2">
-            <a:extLst>
-              <a:ext uri="{FF2B5EF4-FFF2-40B4-BE49-F238E27FC236}">
-                <a16:creationId xmlns:a16="http://schemas.microsoft.com/office/drawing/2014/main" id="{1643D8E3-4236-898B-427F-203EC0AD3737}"/>
-              </a:ext>
-            </a:extLst>
-          </p:cNvPr>
-          <p:cNvSpPr>
-            <a:spLocks noGrp="1"/>
-          </p:cNvSpPr>
-          <p:nvPr>
-            <p:ph idx="1"/>
-          </p:nvPr>
-        </p:nvSpPr>
-        <p:spPr/>
-        <p:txBody>
-          <a:bodyPr/>
-          <a:lstStyle/>
-          <a:p>
-            <a:endParaRPr lang="en-US" dirty="0"/>
-          </a:p>
-          <a:p>
-            <a:pPr marL="0" indent="0">
-              <a:buNone/>
-            </a:pPr>
-            <a:endParaRPr lang="en-US" dirty="0"/>
-          </a:p>
-        </p:txBody>
-      </p:sp>
-      <p:sp>
-        <p:nvSpPr>
-          <p:cNvPr id="4" name="Textplatzhalter 3">
-            <a:extLst>
-              <a:ext uri="{FF2B5EF4-FFF2-40B4-BE49-F238E27FC236}">
-                <a16:creationId xmlns:a16="http://schemas.microsoft.com/office/drawing/2014/main" id="{E27FC90F-B95F-42AC-244A-8A05F68C9B18}"/>
-              </a:ext>
-            </a:extLst>
-          </p:cNvPr>
-          <p:cNvSpPr>
-            <a:spLocks noGrp="1"/>
-          </p:cNvSpPr>
-          <p:nvPr>
-            <p:ph type="body" sz="quarter" idx="10"/>
-          </p:nvPr>
-        </p:nvSpPr>
-        <p:spPr/>
-        <p:txBody>
-          <a:bodyPr/>
-          <a:lstStyle/>
-          <a:p>
-            <a:endParaRPr lang="en-US"/>
-          </a:p>
-        </p:txBody>
-      </p:sp>
-    </p:spTree>
-    <p:extLst>
-      <p:ext uri="{BB962C8B-B14F-4D97-AF65-F5344CB8AC3E}">
-        <p14:creationId xmlns:p14="http://schemas.microsoft.com/office/powerpoint/2010/main" val="365156771"/>
-      </p:ext>
-    </p:extLst>
-  </p:cSld>
-  <p:clrMapOvr>
-    <a:masterClrMapping/>
-  </p:clrMapOvr>
-  <mc:AlternateContent xmlns:mc="http://schemas.openxmlformats.org/markup-compatibility/2006" xmlns:p14="http://schemas.microsoft.com/office/powerpoint/2010/main">
-    <mc:Choice Requires="p14">
-      <p:transition p14:dur="250">
-        <p:fade/>
-      </p:transition>
-    </mc:Choice>
-    <mc:Fallback xmlns="">
-      <p:transition>
-        <p:fade/>
-      </p:transition>
-    </mc:Fallback>
-  </mc:AlternateContent>
-</p:sld>
-</file>
-
-<file path=ppt/slides/slide6.xml><?xml version="1.0" encoding="utf-8"?>
-<p:sld xmlns:a="http://schemas.openxmlformats.org/drawingml/2006/main" xmlns:r="http://schemas.openxmlformats.org/officeDocument/2006/relationships" xmlns:p="http://schemas.openxmlformats.org/presentationml/2006/main" show="0">
-  <p:cSld>
-    <p:spTree>
-      <p:nvGrpSpPr>
-        <p:cNvPr id="1" name=""/>
-        <p:cNvGrpSpPr/>
-        <p:nvPr/>
-      </p:nvGrpSpPr>
-      <p:grpSpPr>
-        <a:xfrm>
-          <a:off x="0" y="0"/>
-          <a:ext cx="0" cy="0"/>
-          <a:chOff x="0" y="0"/>
-          <a:chExt cx="0" cy="0"/>
-        </a:xfrm>
-      </p:grpSpPr>
-      <p:sp>
-        <p:nvSpPr>
-          <p:cNvPr id="2" name="Titel 1">
-            <a:extLst>
-              <a:ext uri="{FF2B5EF4-FFF2-40B4-BE49-F238E27FC236}">
-                <a16:creationId xmlns:a16="http://schemas.microsoft.com/office/drawing/2014/main" id="{9915A59C-6338-36DF-DD89-48827A3637C2}"/>
-              </a:ext>
-            </a:extLst>
-          </p:cNvPr>
-          <p:cNvSpPr>
-            <a:spLocks noGrp="1"/>
-          </p:cNvSpPr>
-          <p:nvPr>
-            <p:ph type="title"/>
-          </p:nvPr>
-        </p:nvSpPr>
-        <p:spPr/>
-        <p:txBody>
-          <a:bodyPr/>
-          <a:lstStyle/>
-          <a:p>
-            <a:r>
-              <a:rPr lang="en-US" dirty="0"/>
-              <a:t>Example (Proteus, simplified)</a:t>
-            </a:r>
-          </a:p>
-        </p:txBody>
-      </p:sp>
-      <p:sp>
-        <p:nvSpPr>
-          <p:cNvPr id="4" name="Textplatzhalter 3">
-            <a:extLst>
-              <a:ext uri="{FF2B5EF4-FFF2-40B4-BE49-F238E27FC236}">
-                <a16:creationId xmlns:a16="http://schemas.microsoft.com/office/drawing/2014/main" id="{63EF2857-418F-59B8-723E-9D4A352EE463}"/>
-              </a:ext>
-            </a:extLst>
-          </p:cNvPr>
-          <p:cNvSpPr>
-            <a:spLocks noGrp="1"/>
-          </p:cNvSpPr>
-          <p:nvPr>
-            <p:ph type="body" sz="quarter" idx="10"/>
-          </p:nvPr>
-        </p:nvSpPr>
-        <p:spPr/>
-        <p:txBody>
-          <a:bodyPr/>
-          <a:lstStyle/>
-          <a:p>
-            <a:endParaRPr lang="en-US" dirty="0"/>
-          </a:p>
-        </p:txBody>
-      </p:sp>
-    </p:spTree>
-    <p:extLst>
-      <p:ext uri="{BB962C8B-B14F-4D97-AF65-F5344CB8AC3E}">
-        <p14:creationId xmlns:p14="http://schemas.microsoft.com/office/powerpoint/2010/main" val="1284707976"/>
-      </p:ext>
-    </p:extLst>
-  </p:cSld>
-  <p:clrMapOvr>
-    <a:masterClrMapping/>
-  </p:clrMapOvr>
-  <mc:AlternateContent xmlns:mc="http://schemas.openxmlformats.org/markup-compatibility/2006" xmlns:p14="http://schemas.microsoft.com/office/powerpoint/2010/main">
-    <mc:Choice Requires="p14">
-      <p:transition p14:dur="250">
-        <p:fade/>
-      </p:transition>
-    </mc:Choice>
-    <mc:Fallback xmlns="">
-      <p:transition>
-        <p:fade/>
-      </p:transition>
-    </mc:Fallback>
-  </mc:AlternateContent>
-</p:sld>
-</file>
-
-<file path=ppt/slides/slide7.xml><?xml version="1.0" encoding="utf-8"?>
+<file path=ppt/slides/slide4.xml><?xml version="1.0" encoding="utf-8"?>
 <p:sld xmlns:a="http://schemas.openxmlformats.org/drawingml/2006/main" xmlns:r="http://schemas.openxmlformats.org/officeDocument/2006/relationships" xmlns:p="http://schemas.openxmlformats.org/presentationml/2006/main">
   <p:cSld>
     <p:spTree>
@@ -6050,7 +5535,7 @@
           <a:p>
             <a:r>
               <a:rPr lang="en-US" dirty="0"/>
-              <a:t>Questions, remarks, …?</a:t>
+              <a:t>Modelled Example</a:t>
             </a:r>
           </a:p>
         </p:txBody>
@@ -6076,6 +5561,9 @@
           <a:bodyPr/>
           <a:lstStyle/>
           <a:p>
+            <a:endParaRPr lang="en-US" dirty="0"/>
+          </a:p>
+          <a:p>
             <a:pPr marL="0" indent="0">
               <a:buNone/>
             </a:pPr>
@@ -6083,48 +5571,53 @@
           </a:p>
         </p:txBody>
       </p:sp>
-      <p:sp>
-        <p:nvSpPr>
-          <p:cNvPr id="4" name="Textplatzhalter 3">
+      <p:pic>
+        <p:nvPicPr>
+          <p:cNvPr id="6" name="Picture 5">
             <a:extLst>
               <a:ext uri="{FF2B5EF4-FFF2-40B4-BE49-F238E27FC236}">
-                <a16:creationId xmlns:a16="http://schemas.microsoft.com/office/drawing/2014/main" id="{E27FC90F-B95F-42AC-244A-8A05F68C9B18}"/>
+                <a16:creationId xmlns:a16="http://schemas.microsoft.com/office/drawing/2014/main" id="{E30CCA76-A8CF-8FB3-FD8A-A95352AB34F2}"/>
               </a:ext>
             </a:extLst>
           </p:cNvPr>
-          <p:cNvSpPr>
-            <a:spLocks noGrp="1"/>
-          </p:cNvSpPr>
-          <p:nvPr>
-            <p:ph type="body" sz="quarter" idx="10"/>
-          </p:nvPr>
-        </p:nvSpPr>
-        <p:spPr/>
-        <p:txBody>
-          <a:bodyPr/>
-          <a:lstStyle/>
-          <a:p>
-            <a:endParaRPr lang="en-US"/>
-          </a:p>
-        </p:txBody>
-      </p:sp>
+          <p:cNvPicPr>
+            <a:picLocks noChangeAspect="1"/>
+          </p:cNvPicPr>
+          <p:nvPr/>
+        </p:nvPicPr>
+        <p:blipFill>
+          <a:blip r:embed="rId2"/>
+          <a:stretch>
+            <a:fillRect/>
+          </a:stretch>
+        </p:blipFill>
+        <p:spPr>
+          <a:xfrm>
+            <a:off x="304800" y="1005234"/>
+            <a:ext cx="4418411" cy="3514536"/>
+          </a:xfrm>
+          <a:prstGeom prst="rect">
+            <a:avLst/>
+          </a:prstGeom>
+        </p:spPr>
+      </p:pic>
     </p:spTree>
     <p:extLst>
       <p:ext uri="{BB962C8B-B14F-4D97-AF65-F5344CB8AC3E}">
-        <p14:creationId xmlns:p14="http://schemas.microsoft.com/office/powerpoint/2010/main" val="4163381459"/>
+        <p14:creationId xmlns:p14="http://schemas.microsoft.com/office/powerpoint/2010/main" val="365156771"/>
       </p:ext>
     </p:extLst>
   </p:cSld>
   <p:clrMapOvr>
     <a:masterClrMapping/>
   </p:clrMapOvr>
-  <mc:AlternateContent xmlns:mc="http://schemas.openxmlformats.org/markup-compatibility/2006" xmlns:p14="http://schemas.microsoft.com/office/powerpoint/2010/main">
-    <mc:Choice Requires="p14">
+  <mc:AlternateContent xmlns:mc="http://schemas.openxmlformats.org/markup-compatibility/2006">
+    <mc:Choice xmlns:p14="http://schemas.microsoft.com/office/powerpoint/2010/main" Requires="p14">
       <p:transition p14:dur="250">
         <p:fade/>
       </p:transition>
     </mc:Choice>
-    <mc:Fallback xmlns="">
+    <mc:Fallback>
       <p:transition>
         <p:fade/>
       </p:transition>
